--- a/Qwen3_on_1050ti.pptx
+++ b/Qwen3_on_1050ti.pptx
@@ -116,6 +116,11 @@
       </a:defRPr>
     </a:lvl9pPr>
   </p:defaultTextStyle>
+  <p:extLst>
+    <p:ext uri="{EFAFB233-063F-42B5-8137-9DF3F51BA10A}">
+      <p15:sldGuideLst xmlns:p15="http://schemas.microsoft.com/office/powerpoint/2012/main"/>
+    </p:ext>
+  </p:extLst>
 </p:presentation>
 </file>
 
@@ -4722,6 +4727,21 @@
               <a:t>Running a 35B AI Model on 6GB VRAM, FAST (llama.cpp Guide)</a:t>
             </a:r>
             <a:endParaRPr lang="en-US" altLang="zh-TW" u="sng" dirty="0"/>
+          </a:p>
+          <a:p>
+            <a:r>
+              <a:rPr lang="en-US" altLang="zh-TW" dirty="0" err="1">
+                <a:hlinkClick r:id="rId5"/>
+              </a:rPr>
+              <a:t>unsloth</a:t>
+            </a:r>
+            <a:r>
+              <a:rPr lang="en-US" altLang="zh-TW" dirty="0">
+                <a:hlinkClick r:id="rId5"/>
+              </a:rPr>
+              <a:t>/Qwen3.6-35B-A3B-GGUF</a:t>
+            </a:r>
+            <a:endParaRPr lang="en-US" altLang="zh-TW" dirty="0"/>
           </a:p>
           <a:p>
             <a:endParaRPr lang="en-US" altLang="zh-TW" dirty="0"/>
